--- a/dist/초1/국어/한글/초1_국어_한글_06_낱말읽고쓰기_학생용.pptx
+++ b/dist/초1/국어/한글/초1_국어_한글_06_낱말읽고쓰기_학생용.pptx
@@ -117,43 +117,43 @@
   <p:extLst>
     <p:ext uri="{521415D9-36F7-43E2-AB2F-B90AF26B5E84}">
       <p14:sectionLst xmlns:p14="http://schemas.microsoft.com/office/powerpoint/2010/main">
-        <p14:section name="도입" id="{b302ddac-386a-2283-8fe1-91299e9fd3c1}">
+        <p14:section name="도입" id="{29c3ee0c-42b7-dfec-c777-a7e11af98b32}">
           <p14:sldIdLst>
             <p14:sldId id="256"/>
             <p14:sldId id="257"/>
           </p14:sldIdLst>
         </p14:section>
-        <p14:section name="개념" id="{7c84cb0e-96b5-4f07-965e-bc454196f80c}">
+        <p14:section name="개념" id="{04a326e0-ba5d-02e5-4643-3ca56010c6f3}">
           <p14:sldIdLst>
             <p14:sldId id="258"/>
             <p14:sldId id="261"/>
           </p14:sldIdLst>
         </p14:section>
-        <p14:section name="연습" id="{a7e3bf04-ce0e-3b67-7bf5-1af7a64386c8}">
+        <p14:section name="연습" id="{2fc17c3a-29a9-b1ef-8437-8fd9ba9b997a}">
           <p14:sldIdLst>
             <p14:sldId id="259"/>
             <p14:sldId id="260"/>
             <p14:sldId id="262"/>
           </p14:sldIdLst>
         </p14:section>
-        <p14:section name="개념" id="{149da2bd-2aa6-7abf-fb91-9a0d74456cd4}">
+        <p14:section name="개념" id="{dd2fb13d-eca8-5bbf-306c-46a9cb23dc1a}">
           <p14:sldIdLst/>
         </p14:section>
-        <p14:section name="연습" id="{ac1771ae-13cc-3862-7358-d62c43025185}">
+        <p14:section name="연습" id="{3ff20e8e-ea22-048f-955e-9d67785b1491}">
           <p14:sldIdLst/>
         </p14:section>
-        <p14:section name="확인" id="{226b175b-fdd7-9bd5-1fc3-cc80a89d595c}">
+        <p14:section name="확인" id="{c888644c-9442-be05-2c19-7ccb38122c53}">
           <p14:sldIdLst>
             <p14:sldId id="263"/>
             <p14:sldId id="264"/>
           </p14:sldIdLst>
         </p14:section>
-        <p14:section name="정리" id="{6ecceb74-7263-2853-fd8d-f741cc59a595}">
+        <p14:section name="정리" id="{b8bcbe62-73d1-3348-f0ae-65d91608351a}">
           <p14:sldIdLst>
             <p14:sldId id="265"/>
           </p14:sldIdLst>
         </p14:section>
-        <p14:section name="보충" id="{4ff69834-0c4e-dd50-d36c-19ac40b6e133}">
+        <p14:section name="보충" id="{f77b122e-204b-3f83-cd5d-ad5be21437a6}">
           <p14:sldIdLst>
             <p14:sldId id="266"/>
           </p14:sldIdLst>
@@ -4136,7 +4136,7 @@
         </p:nvSpPr>
         <p:spPr>
           <a:xfrm>
-            <a:off x="548640" y="2459736"/>
+            <a:off x="548640" y="2734056"/>
             <a:ext cx="566928" cy="566928"/>
           </a:xfrm>
           <a:prstGeom prst="roundRect">
@@ -4183,12 +4183,12 @@
         </p:nvSpPr>
         <p:spPr>
           <a:xfrm>
-            <a:off x="1344168" y="2109216"/>
-            <a:ext cx="1267968" cy="1267968"/>
+            <a:off x="1828800" y="2331720"/>
+            <a:ext cx="1371600" cy="1371600"/>
           </a:xfrm>
           <a:prstGeom prst="roundRect">
             <a:avLst>
-              <a:gd name="adj" fmla="val 10096"/>
+              <a:gd name="adj" fmla="val 9333"/>
             </a:avLst>
           </a:prstGeom>
           <a:solidFill>
@@ -4208,7 +4208,7 @@
               <a:buNone/>
             </a:pPr>
             <a:r>
-              <a:rPr lang="ko-KR" altLang="en-US" sz="5500" b="1" dirty="0">
+              <a:rPr lang="ko-KR" altLang="en-US" sz="5900" b="1" dirty="0">
                 <a:solidFill>
                   <a:srgbClr val="1F2937"/>
                 </a:solidFill>
@@ -4218,7 +4218,7 @@
               </a:rPr>
               <a:t>꼬</a:t>
             </a:r>
-            <a:endParaRPr lang="ko-KR" sz="5500" dirty="0"/>
+            <a:endParaRPr lang="ko-KR" sz="5900" dirty="0"/>
           </a:p>
         </p:txBody>
       </p:sp>
@@ -4230,12 +4230,12 @@
         </p:nvSpPr>
         <p:spPr>
           <a:xfrm>
-            <a:off x="2813304" y="2109216"/>
-            <a:ext cx="1267968" cy="1267968"/>
+            <a:off x="3401568" y="2331720"/>
+            <a:ext cx="1371600" cy="1371600"/>
           </a:xfrm>
           <a:prstGeom prst="roundRect">
             <a:avLst>
-              <a:gd name="adj" fmla="val 10096"/>
+              <a:gd name="adj" fmla="val 9333"/>
             </a:avLst>
           </a:prstGeom>
           <a:solidFill>
@@ -4255,7 +4255,7 @@
               <a:buNone/>
             </a:pPr>
             <a:r>
-              <a:rPr lang="ko-KR" altLang="en-US" sz="5500" b="1" dirty="0">
+              <a:rPr lang="ko-KR" altLang="en-US" sz="5900" b="1" dirty="0">
                 <a:solidFill>
                   <a:srgbClr val="1F2937"/>
                 </a:solidFill>
@@ -4265,7 +4265,7 @@
               </a:rPr>
               <a:t>배</a:t>
             </a:r>
-            <a:endParaRPr lang="ko-KR" sz="5500" dirty="0"/>
+            <a:endParaRPr lang="ko-KR" sz="5900" dirty="0"/>
           </a:p>
         </p:txBody>
       </p:sp>
@@ -4277,12 +4277,12 @@
         </p:nvSpPr>
         <p:spPr>
           <a:xfrm>
-            <a:off x="4282440" y="2109216"/>
-            <a:ext cx="1267968" cy="1267968"/>
+            <a:off x="4974336" y="2331720"/>
+            <a:ext cx="1371600" cy="1371600"/>
           </a:xfrm>
           <a:prstGeom prst="roundRect">
             <a:avLst>
-              <a:gd name="adj" fmla="val 10096"/>
+              <a:gd name="adj" fmla="val 9333"/>
             </a:avLst>
           </a:prstGeom>
           <a:solidFill>
@@ -4302,7 +4302,7 @@
               <a:buNone/>
             </a:pPr>
             <a:r>
-              <a:rPr lang="ko-KR" altLang="en-US" sz="5500" b="1" dirty="0">
+              <a:rPr lang="ko-KR" altLang="en-US" sz="5900" b="1" dirty="0">
                 <a:solidFill>
                   <a:srgbClr val="1F2937"/>
                 </a:solidFill>
@@ -4312,7 +4312,7 @@
               </a:rPr>
               <a:t>과</a:t>
             </a:r>
-            <a:endParaRPr lang="ko-KR" sz="5500" dirty="0"/>
+            <a:endParaRPr lang="ko-KR" sz="5900" dirty="0"/>
           </a:p>
         </p:txBody>
       </p:sp>
@@ -4324,7 +4324,7 @@
         </p:nvSpPr>
         <p:spPr>
           <a:xfrm>
-            <a:off x="548640" y="4654296"/>
+            <a:off x="548640" y="4928616"/>
             <a:ext cx="566928" cy="566928"/>
           </a:xfrm>
           <a:prstGeom prst="roundRect">
@@ -4371,12 +4371,12 @@
         </p:nvSpPr>
         <p:spPr>
           <a:xfrm>
-            <a:off x="1344168" y="4206240"/>
-            <a:ext cx="1965960" cy="1463040"/>
+            <a:off x="1344168" y="4343400"/>
+            <a:ext cx="2606040" cy="1737360"/>
           </a:xfrm>
           <a:prstGeom prst="roundRect">
             <a:avLst>
-              <a:gd name="adj" fmla="val 8750"/>
+              <a:gd name="adj" fmla="val 7368"/>
             </a:avLst>
           </a:prstGeom>
           <a:solidFill>
@@ -4418,12 +4418,12 @@
         </p:nvSpPr>
         <p:spPr>
           <a:xfrm>
-            <a:off x="3584448" y="4206240"/>
-            <a:ext cx="1965960" cy="1463040"/>
+            <a:off x="4224528" y="4343400"/>
+            <a:ext cx="2606040" cy="1737360"/>
           </a:xfrm>
           <a:prstGeom prst="roundRect">
             <a:avLst>
-              <a:gd name="adj" fmla="val 8750"/>
+              <a:gd name="adj" fmla="val 7368"/>
             </a:avLst>
           </a:prstGeom>
           <a:solidFill>
@@ -6661,7 +6661,7 @@
         </p:nvSpPr>
         <p:spPr>
           <a:xfrm>
-            <a:off x="2432304" y="2011680"/>
+            <a:off x="3072384" y="2011680"/>
             <a:ext cx="914400" cy="914400"/>
           </a:xfrm>
           <a:prstGeom prst="roundRect">
@@ -6697,7 +6697,7 @@
         </p:nvSpPr>
         <p:spPr>
           <a:xfrm>
-            <a:off x="3547872" y="2011680"/>
+            <a:off x="4187952" y="2011680"/>
             <a:ext cx="914400" cy="914400"/>
           </a:xfrm>
           <a:prstGeom prst="roundRect">
@@ -6780,7 +6780,7 @@
         </p:nvSpPr>
         <p:spPr>
           <a:xfrm>
-            <a:off x="1874520" y="3108960"/>
+            <a:off x="2514600" y="3108960"/>
             <a:ext cx="914400" cy="914400"/>
           </a:xfrm>
           <a:prstGeom prst="roundRect">
@@ -6816,7 +6816,7 @@
         </p:nvSpPr>
         <p:spPr>
           <a:xfrm>
-            <a:off x="2990088" y="3108960"/>
+            <a:off x="3630168" y="3108960"/>
             <a:ext cx="914400" cy="914400"/>
           </a:xfrm>
           <a:prstGeom prst="roundRect">
@@ -6852,7 +6852,7 @@
         </p:nvSpPr>
         <p:spPr>
           <a:xfrm>
-            <a:off x="4105656" y="3108960"/>
+            <a:off x="4745736" y="3108960"/>
             <a:ext cx="914400" cy="914400"/>
           </a:xfrm>
           <a:prstGeom prst="roundRect">
@@ -6935,7 +6935,7 @@
         </p:nvSpPr>
         <p:spPr>
           <a:xfrm>
-            <a:off x="2432304" y="4206240"/>
+            <a:off x="3072384" y="4206240"/>
             <a:ext cx="914400" cy="914400"/>
           </a:xfrm>
           <a:prstGeom prst="roundRect">
@@ -6971,7 +6971,7 @@
         </p:nvSpPr>
         <p:spPr>
           <a:xfrm>
-            <a:off x="3547872" y="4206240"/>
+            <a:off x="4187952" y="4206240"/>
             <a:ext cx="914400" cy="914400"/>
           </a:xfrm>
           <a:prstGeom prst="roundRect">
@@ -7208,7 +7208,7 @@
         <p:spPr>
           <a:xfrm>
             <a:off x="1344168" y="2011680"/>
-            <a:ext cx="1965960" cy="1280160"/>
+            <a:ext cx="2606040" cy="1280160"/>
           </a:xfrm>
           <a:prstGeom prst="roundRect">
             <a:avLst>
@@ -7254,8 +7254,8 @@
         </p:nvSpPr>
         <p:spPr>
           <a:xfrm>
-            <a:off x="3584448" y="2011680"/>
-            <a:ext cx="1965960" cy="1280160"/>
+            <a:off x="4224528" y="2011680"/>
+            <a:ext cx="2606040" cy="1280160"/>
           </a:xfrm>
           <a:prstGeom prst="roundRect">
             <a:avLst>
@@ -7349,7 +7349,7 @@
         <p:spPr>
           <a:xfrm>
             <a:off x="1344168" y="3474720"/>
-            <a:ext cx="1965960" cy="1280160"/>
+            <a:ext cx="2606040" cy="1280160"/>
           </a:xfrm>
           <a:prstGeom prst="roundRect">
             <a:avLst>
@@ -7395,8 +7395,8 @@
         </p:nvSpPr>
         <p:spPr>
           <a:xfrm>
-            <a:off x="3584448" y="3474720"/>
-            <a:ext cx="1965960" cy="1280160"/>
+            <a:off x="4224528" y="3474720"/>
+            <a:ext cx="2606040" cy="1280160"/>
           </a:xfrm>
           <a:prstGeom prst="roundRect">
             <a:avLst>

--- a/dist/초1/국어/한글/초1_국어_한글_06_낱말읽고쓰기_학생용.pptx
+++ b/dist/초1/국어/한글/초1_국어_한글_06_낱말읽고쓰기_학생용.pptx
@@ -117,43 +117,43 @@
   <p:extLst>
     <p:ext uri="{521415D9-36F7-43E2-AB2F-B90AF26B5E84}">
       <p14:sectionLst xmlns:p14="http://schemas.microsoft.com/office/powerpoint/2010/main">
-        <p14:section name="도입" id="{29c3ee0c-42b7-dfec-c777-a7e11af98b32}">
+        <p14:section name="도입" id="{099c3ab6-a4ed-c07c-ef2a-c0b023f1c5be}">
           <p14:sldIdLst>
             <p14:sldId id="256"/>
             <p14:sldId id="257"/>
           </p14:sldIdLst>
         </p14:section>
-        <p14:section name="개념" id="{04a326e0-ba5d-02e5-4643-3ca56010c6f3}">
+        <p14:section name="개념" id="{ca44401c-5efc-90d0-aac1-a40f358d98ea}">
           <p14:sldIdLst>
             <p14:sldId id="258"/>
             <p14:sldId id="261"/>
           </p14:sldIdLst>
         </p14:section>
-        <p14:section name="연습" id="{2fc17c3a-29a9-b1ef-8437-8fd9ba9b997a}">
+        <p14:section name="연습" id="{1f486f83-a2bc-90f3-8e61-b3db0a6f6b0f}">
           <p14:sldIdLst>
             <p14:sldId id="259"/>
             <p14:sldId id="260"/>
             <p14:sldId id="262"/>
           </p14:sldIdLst>
         </p14:section>
-        <p14:section name="개념" id="{dd2fb13d-eca8-5bbf-306c-46a9cb23dc1a}">
+        <p14:section name="개념" id="{3943099f-7318-cbd3-c188-55e8b686c449}">
           <p14:sldIdLst/>
         </p14:section>
-        <p14:section name="연습" id="{3ff20e8e-ea22-048f-955e-9d67785b1491}">
+        <p14:section name="연습" id="{f20c30b1-197e-1724-eb9a-5f891eb6e83b}">
           <p14:sldIdLst/>
         </p14:section>
-        <p14:section name="확인" id="{c888644c-9442-be05-2c19-7ccb38122c53}">
+        <p14:section name="확인" id="{6d835738-ff8d-c145-8c0c-f01027a06a89}">
           <p14:sldIdLst>
             <p14:sldId id="263"/>
             <p14:sldId id="264"/>
           </p14:sldIdLst>
         </p14:section>
-        <p14:section name="정리" id="{b8bcbe62-73d1-3348-f0ae-65d91608351a}">
+        <p14:section name="정리" id="{13a597f1-57fd-5ba8-e84c-8280879257aa}">
           <p14:sldIdLst>
             <p14:sldId id="265"/>
           </p14:sldIdLst>
         </p14:section>
-        <p14:section name="보충" id="{f77b122e-204b-3f83-cd5d-ad5be21437a6}">
+        <p14:section name="보충" id="{1d8510d8-faf1-8bd3-bedb-504b5f907d6f}">
           <p14:sldIdLst>
             <p14:sldId id="266"/>
           </p14:sldIdLst>
